--- a/dist/초5/과학/몸과건강/초5_과학_몸과건강_02_기관의협력.pptx
+++ b/dist/초5/과학/몸과건강/초5_과학_몸과건강_02_기관의협력.pptx
@@ -3168,7 +3168,7 @@
           <a:bodyPr wrap="square" lIns="0" tIns="0" rIns="0" bIns="0" rtlCol="0" anchor="ctr"/>
           <a:lstStyle/>
           <a:p>
-            <a:pPr algn="l" indent="0" marL="0">
+            <a:pPr eaLnBrk="0" algn="l" indent="0" marL="0">
               <a:buNone/>
             </a:pPr>
             <a:r>
@@ -3209,7 +3209,7 @@
           <a:bodyPr wrap="square" lIns="0" tIns="0" rIns="0" bIns="0" rtlCol="0" anchor="t"/>
           <a:lstStyle/>
           <a:p>
-            <a:pPr indent="0" marL="0">
+            <a:pPr eaLnBrk="0" indent="0" marL="0">
               <a:buNone/>
             </a:pPr>
             <a:r>
@@ -3226,7 +3226,7 @@
             <a:endParaRPr lang="ko-KR" sz="2800" dirty="0"/>
           </a:p>
           <a:p>
-            <a:pPr indent="0" marL="0">
+            <a:pPr eaLnBrk="0" indent="0" marL="0">
               <a:buNone/>
             </a:pPr>
             <a:r>
@@ -3273,7 +3273,7 @@
       </p:sp>
       <p:sp>
         <p:nvSpPr>
-          <p:cNvPr id="5" name="S01-figure2"/>
+          <p:cNvPr id="5" name="S01-figure2" descr="손바닥이 위를 향한 팔의 손목 안쪽 엄지 쪽(빨간 점)에 다른 손의 두 손가락(검지·중지)을 가볍게 대는 그림"/>
           <p:cNvSpPr/>
           <p:nvPr/>
         </p:nvSpPr>
@@ -3467,7 +3467,7 @@
           <a:bodyPr wrap="square" lIns="0" tIns="0" rIns="0" bIns="0" rtlCol="0" anchor="ctr"/>
           <a:lstStyle/>
           <a:p>
-            <a:pPr algn="ctr" indent="0" marL="0">
+            <a:pPr eaLnBrk="0" algn="ctr" indent="0" marL="0">
               <a:buNone/>
             </a:pPr>
             <a:r>
@@ -3506,7 +3506,7 @@
           <a:bodyPr wrap="square" lIns="0" tIns="0" rIns="0" bIns="0" rtlCol="0" anchor="ctr"/>
           <a:lstStyle/>
           <a:p>
-            <a:pPr algn="ctr" indent="0" marL="0">
+            <a:pPr eaLnBrk="0" algn="ctr" indent="0" marL="0">
               <a:buNone/>
             </a:pPr>
             <a:r>
@@ -3545,7 +3545,7 @@
           <a:bodyPr wrap="square" lIns="0" tIns="0" rIns="0" bIns="0" rtlCol="0" anchor="ctr"/>
           <a:lstStyle/>
           <a:p>
-            <a:pPr algn="ctr" indent="0" marL="0">
+            <a:pPr eaLnBrk="0" algn="ctr" indent="0" marL="0">
               <a:buNone/>
             </a:pPr>
             <a:r>
@@ -3611,7 +3611,7 @@
           <a:bodyPr wrap="square" lIns="0" tIns="0" rIns="0" bIns="0" rtlCol="0" anchor="ctr"/>
           <a:lstStyle/>
           <a:p>
-            <a:pPr indent="0" marL="0">
+            <a:pPr eaLnBrk="0" indent="0" marL="0">
               <a:spcAft>
                 <a:spcPts val="600"/>
               </a:spcAft>
@@ -3631,7 +3631,7 @@
             <a:endParaRPr lang="ko-KR" sz="2800" dirty="0"/>
           </a:p>
           <a:p>
-            <a:pPr indent="0" marL="0">
+            <a:pPr eaLnBrk="0" indent="0" marL="0">
               <a:spcAft>
                 <a:spcPts val="600"/>
               </a:spcAft>
@@ -3651,7 +3651,7 @@
             <a:endParaRPr lang="ko-KR" sz="2800" dirty="0"/>
           </a:p>
           <a:p>
-            <a:pPr indent="0" marL="0">
+            <a:pPr eaLnBrk="0" indent="0" marL="0">
               <a:spcAft>
                 <a:spcPts val="600"/>
               </a:spcAft>
@@ -3720,7 +3720,7 @@
           <a:bodyPr wrap="square" lIns="0" tIns="0" rIns="0" bIns="0" rtlCol="0" anchor="ctr"/>
           <a:lstStyle/>
           <a:p>
-            <a:pPr algn="l" indent="0" marL="0">
+            <a:pPr eaLnBrk="0" algn="l" indent="0" marL="0">
               <a:buNone/>
             </a:pPr>
             <a:r>
@@ -3759,7 +3759,7 @@
           <a:bodyPr wrap="square" lIns="0" tIns="0" rIns="0" bIns="0" rtlCol="0" anchor="ctr"/>
           <a:lstStyle/>
           <a:p>
-            <a:pPr algn="l" indent="0" marL="0">
+            <a:pPr eaLnBrk="0" algn="l" indent="0" marL="0">
               <a:buNone/>
             </a:pPr>
             <a:r>
@@ -3776,7 +3776,7 @@
             <a:endParaRPr lang="ko-KR" sz="2800" dirty="0"/>
           </a:p>
           <a:p>
-            <a:pPr algn="l" indent="0" marL="0">
+            <a:pPr eaLnBrk="0" algn="l" indent="0" marL="0">
               <a:buNone/>
             </a:pPr>
             <a:r>
@@ -3796,7 +3796,7 @@
       </p:sp>
       <p:sp>
         <p:nvSpPr>
-          <p:cNvPr id="4" name="S10-figure85"/>
+          <p:cNvPr id="4" name="S10-figure85" descr="기관 협력 모형: 가운데 순환 기관(심장·혈관) 상자. 위의 폐(호흡 기관)에서 산소가 들어오고 이산화 탄소가 폐로 나감. 왼쪽 작은창자(소화 기관)에서 영양소가 들어옴. 오른쪽 근육(운동 기관)으로 산소·영양소가 가고, 근육에서 이산화 탄소·노폐물이 돌아옴. 아래 콩팥(배설 기관)으로 노폐물이 감"/>
           <p:cNvSpPr/>
           <p:nvPr/>
         </p:nvSpPr>
@@ -4189,7 +4189,7 @@
           <a:bodyPr wrap="square" lIns="0" tIns="0" rIns="0" bIns="0" rtlCol="0" anchor="ctr"/>
           <a:lstStyle/>
           <a:p>
-            <a:pPr algn="ctr" indent="0" marL="0">
+            <a:pPr eaLnBrk="0" algn="ctr" indent="0" marL="0">
               <a:buNone/>
             </a:pPr>
             <a:r>
@@ -4228,7 +4228,7 @@
           <a:bodyPr wrap="square" lIns="0" tIns="0" rIns="0" bIns="0" rtlCol="0" anchor="ctr"/>
           <a:lstStyle/>
           <a:p>
-            <a:pPr algn="ctr" indent="0" marL="0">
+            <a:pPr eaLnBrk="0" algn="ctr" indent="0" marL="0">
               <a:buNone/>
             </a:pPr>
             <a:r>
@@ -4267,7 +4267,7 @@
           <a:bodyPr wrap="square" lIns="0" tIns="0" rIns="0" bIns="0" rtlCol="0" anchor="ctr"/>
           <a:lstStyle/>
           <a:p>
-            <a:pPr algn="ctr" indent="0" marL="0">
+            <a:pPr eaLnBrk="0" algn="ctr" indent="0" marL="0">
               <a:buNone/>
             </a:pPr>
             <a:r>
@@ -4306,7 +4306,7 @@
           <a:bodyPr wrap="square" lIns="0" tIns="0" rIns="0" bIns="0" rtlCol="0" anchor="ctr"/>
           <a:lstStyle/>
           <a:p>
-            <a:pPr algn="ctr" indent="0" marL="0">
+            <a:pPr eaLnBrk="0" algn="ctr" indent="0" marL="0">
               <a:buNone/>
             </a:pPr>
             <a:r>
@@ -4345,7 +4345,7 @@
           <a:bodyPr wrap="square" lIns="0" tIns="0" rIns="0" bIns="0" rtlCol="0" anchor="ctr"/>
           <a:lstStyle/>
           <a:p>
-            <a:pPr algn="ctr" indent="0" marL="0">
+            <a:pPr eaLnBrk="0" algn="ctr" indent="0" marL="0">
               <a:buNone/>
             </a:pPr>
             <a:r>
@@ -4384,7 +4384,7 @@
           <a:bodyPr wrap="square" lIns="0" tIns="0" rIns="0" bIns="0" rtlCol="0" anchor="ctr"/>
           <a:lstStyle/>
           <a:p>
-            <a:pPr algn="ctr" indent="0" marL="0">
+            <a:pPr eaLnBrk="0" algn="ctr" indent="0" marL="0">
               <a:buNone/>
             </a:pPr>
             <a:r>
@@ -4423,7 +4423,7 @@
           <a:bodyPr wrap="square" lIns="0" tIns="0" rIns="0" bIns="0" rtlCol="0" anchor="ctr"/>
           <a:lstStyle/>
           <a:p>
-            <a:pPr algn="ctr" indent="0" marL="0">
+            <a:pPr eaLnBrk="0" algn="ctr" indent="0" marL="0">
               <a:buNone/>
             </a:pPr>
             <a:r>
@@ -4462,7 +4462,7 @@
           <a:bodyPr wrap="square" lIns="0" tIns="0" rIns="0" bIns="0" rtlCol="0" anchor="ctr"/>
           <a:lstStyle/>
           <a:p>
-            <a:pPr algn="ctr" indent="0" marL="0">
+            <a:pPr eaLnBrk="0" algn="ctr" indent="0" marL="0">
               <a:buNone/>
             </a:pPr>
             <a:r>
@@ -4501,7 +4501,7 @@
           <a:bodyPr wrap="square" lIns="0" tIns="0" rIns="0" bIns="0" rtlCol="0" anchor="ctr"/>
           <a:lstStyle/>
           <a:p>
-            <a:pPr algn="ctr" indent="0" marL="0">
+            <a:pPr eaLnBrk="0" algn="ctr" indent="0" marL="0">
               <a:buNone/>
             </a:pPr>
             <a:r>
@@ -4540,7 +4540,7 @@
           <a:bodyPr wrap="square" lIns="0" tIns="0" rIns="0" bIns="0" rtlCol="0" anchor="ctr"/>
           <a:lstStyle/>
           <a:p>
-            <a:pPr algn="ctr" indent="0" marL="0">
+            <a:pPr eaLnBrk="0" algn="ctr" indent="0" marL="0">
               <a:buNone/>
             </a:pPr>
             <a:r>
@@ -4579,7 +4579,7 @@
           <a:bodyPr wrap="square" lIns="0" tIns="0" rIns="0" bIns="0" rtlCol="0" anchor="ctr"/>
           <a:lstStyle/>
           <a:p>
-            <a:pPr algn="ctr" indent="0" marL="0">
+            <a:pPr eaLnBrk="0" algn="ctr" indent="0" marL="0">
               <a:buNone/>
             </a:pPr>
             <a:r>
@@ -4618,7 +4618,7 @@
           <a:bodyPr wrap="square" lIns="0" tIns="0" rIns="0" bIns="0" rtlCol="0" anchor="ctr"/>
           <a:lstStyle/>
           <a:p>
-            <a:pPr algn="ctr" indent="0" marL="0">
+            <a:pPr eaLnBrk="0" algn="ctr" indent="0" marL="0">
               <a:buNone/>
             </a:pPr>
             <a:r>
@@ -4657,7 +4657,7 @@
           <a:bodyPr wrap="square" lIns="0" tIns="0" rIns="0" bIns="0" rtlCol="0" anchor="ctr"/>
           <a:lstStyle/>
           <a:p>
-            <a:pPr algn="ctr" indent="0" marL="0">
+            <a:pPr eaLnBrk="0" algn="ctr" indent="0" marL="0">
               <a:buNone/>
             </a:pPr>
             <a:r>
@@ -4696,7 +4696,7 @@
           <a:bodyPr wrap="square" lIns="0" tIns="0" rIns="0" bIns="0" rtlCol="0" anchor="ctr"/>
           <a:lstStyle/>
           <a:p>
-            <a:pPr algn="ctr" indent="0" marL="0">
+            <a:pPr eaLnBrk="0" algn="ctr" indent="0" marL="0">
               <a:buNone/>
             </a:pPr>
             <a:r>
@@ -4735,7 +4735,7 @@
           <a:bodyPr wrap="square" lIns="0" tIns="0" rIns="0" bIns="0" rtlCol="0" anchor="ctr"/>
           <a:lstStyle/>
           <a:p>
-            <a:pPr algn="ctr" indent="0" marL="0">
+            <a:pPr eaLnBrk="0" algn="ctr" indent="0" marL="0">
               <a:buNone/>
             </a:pPr>
             <a:r>
@@ -4774,7 +4774,7 @@
           <a:bodyPr wrap="square" lIns="0" tIns="0" rIns="0" bIns="0" rtlCol="0" anchor="ctr"/>
           <a:lstStyle/>
           <a:p>
-            <a:pPr algn="ctr" indent="0" marL="0">
+            <a:pPr eaLnBrk="0" algn="ctr" indent="0" marL="0">
               <a:buNone/>
             </a:pPr>
             <a:r>
@@ -4831,7 +4831,7 @@
             </a:lvl1pPr>
           </a:lstStyle>
           <a:p>
-            <a:pPr algn="r"/>
+            <a:pPr eaLnBrk="0" algn="r"/>
             <a:fld id="{F7021451-1387-4CA6-816F-3879F97B5CBC}" type="slidenum">
               <a:rPr b="0" lang="en-US"/>
               <a:t>10</a:t>
@@ -4888,7 +4888,7 @@
           <a:bodyPr wrap="square" lIns="0" tIns="0" rIns="0" bIns="0" rtlCol="0" anchor="ctr"/>
           <a:lstStyle/>
           <a:p>
-            <a:pPr algn="l" indent="0" marL="0">
+            <a:pPr eaLnBrk="0" algn="l" indent="0" marL="0">
               <a:buNone/>
             </a:pPr>
             <a:r>
@@ -4927,7 +4927,7 @@
           <a:bodyPr wrap="square" lIns="0" tIns="0" rIns="0" bIns="0" rtlCol="0" anchor="ctr"/>
           <a:lstStyle/>
           <a:p>
-            <a:pPr algn="l" indent="0" marL="0">
+            <a:pPr eaLnBrk="0" algn="l" indent="0" marL="0">
               <a:buNone/>
             </a:pPr>
             <a:r>
@@ -4993,7 +4993,7 @@
           <a:bodyPr wrap="square" lIns="0" tIns="0" rIns="0" bIns="0" rtlCol="0" anchor="ctr"/>
           <a:lstStyle/>
           <a:p>
-            <a:pPr indent="0" marL="0">
+            <a:pPr eaLnBrk="0" indent="0" marL="0">
               <a:spcAft>
                 <a:spcPts val="600"/>
               </a:spcAft>
@@ -5043,7 +5043,7 @@
           <a:bodyPr wrap="square" lIns="0" tIns="0" rIns="0" bIns="0" rtlCol="0" anchor="ctr"/>
           <a:lstStyle/>
           <a:p>
-            <a:pPr algn="ctr" indent="0" marL="0">
+            <a:pPr eaLnBrk="0" algn="ctr" indent="0" marL="0">
               <a:buNone/>
             </a:pPr>
             <a:r>
@@ -5082,7 +5082,7 @@
           <a:bodyPr wrap="square" lIns="0" tIns="0" rIns="0" bIns="0" rtlCol="0" anchor="ctr"/>
           <a:lstStyle/>
           <a:p>
-            <a:pPr algn="l" indent="0" marL="0">
+            <a:pPr eaLnBrk="0" algn="l" indent="0" marL="0">
               <a:buNone/>
             </a:pPr>
             <a:r>
@@ -5129,7 +5129,7 @@
           <a:bodyPr wrap="square" lIns="0" tIns="0" rIns="0" bIns="0" rtlCol="0" anchor="ctr"/>
           <a:lstStyle/>
           <a:p>
-            <a:pPr algn="ctr" indent="0" marL="0">
+            <a:pPr eaLnBrk="0" algn="ctr" indent="0" marL="0">
               <a:buNone/>
             </a:pPr>
             <a:r>
@@ -5168,7 +5168,7 @@
           <a:bodyPr wrap="square" lIns="0" tIns="0" rIns="0" bIns="0" rtlCol="0" anchor="ctr"/>
           <a:lstStyle/>
           <a:p>
-            <a:pPr algn="l" indent="0" marL="0">
+            <a:pPr eaLnBrk="0" algn="l" indent="0" marL="0">
               <a:buNone/>
             </a:pPr>
             <a:r>
@@ -5215,7 +5215,7 @@
           <a:bodyPr wrap="square" lIns="0" tIns="0" rIns="0" bIns="0" rtlCol="0" anchor="ctr"/>
           <a:lstStyle/>
           <a:p>
-            <a:pPr algn="ctr" indent="0" marL="0">
+            <a:pPr eaLnBrk="0" algn="ctr" indent="0" marL="0">
               <a:buNone/>
             </a:pPr>
             <a:r>
@@ -5254,7 +5254,7 @@
           <a:bodyPr wrap="square" lIns="0" tIns="0" rIns="0" bIns="0" rtlCol="0" anchor="ctr"/>
           <a:lstStyle/>
           <a:p>
-            <a:pPr algn="l" indent="0" marL="0">
+            <a:pPr eaLnBrk="0" algn="l" indent="0" marL="0">
               <a:buNone/>
             </a:pPr>
             <a:r>
@@ -5271,7 +5271,7 @@
             <a:endParaRPr lang="ko-KR" sz="2800" dirty="0"/>
           </a:p>
           <a:p>
-            <a:pPr algn="l" indent="0" marL="0">
+            <a:pPr eaLnBrk="0" algn="l" indent="0" marL="0">
               <a:buNone/>
             </a:pPr>
             <a:r>
@@ -5318,7 +5318,7 @@
           <a:bodyPr wrap="square" lIns="0" tIns="0" rIns="0" bIns="0" rtlCol="0" anchor="ctr"/>
           <a:lstStyle/>
           <a:p>
-            <a:pPr algn="ctr" indent="0" marL="0">
+            <a:pPr eaLnBrk="0" algn="ctr" indent="0" marL="0">
               <a:buNone/>
             </a:pPr>
             <a:r>
@@ -5357,7 +5357,7 @@
           <a:bodyPr wrap="square" lIns="0" tIns="0" rIns="0" bIns="0" rtlCol="0" anchor="ctr"/>
           <a:lstStyle/>
           <a:p>
-            <a:pPr algn="l" indent="0" marL="0">
+            <a:pPr eaLnBrk="0" algn="l" indent="0" marL="0">
               <a:buNone/>
             </a:pPr>
             <a:r>
@@ -5374,7 +5374,7 @@
             <a:endParaRPr lang="ko-KR" sz="2800" dirty="0"/>
           </a:p>
           <a:p>
-            <a:pPr algn="l" indent="0" marL="0">
+            <a:pPr eaLnBrk="0" algn="l" indent="0" marL="0">
               <a:buNone/>
             </a:pPr>
             <a:r>
@@ -5431,7 +5431,7 @@
             </a:lvl1pPr>
           </a:lstStyle>
           <a:p>
-            <a:pPr algn="r"/>
+            <a:pPr eaLnBrk="0" algn="r"/>
             <a:fld id="{F7021451-1387-4CA6-816F-3879F97B5CBC}" type="slidenum">
               <a:rPr b="0" lang="en-US"/>
               <a:t>11</a:t>
@@ -5488,7 +5488,7 @@
           <a:bodyPr wrap="square" lIns="0" tIns="0" rIns="0" bIns="0" rtlCol="0" anchor="ctr"/>
           <a:lstStyle/>
           <a:p>
-            <a:pPr algn="l" indent="0" marL="0">
+            <a:pPr eaLnBrk="0" algn="l" indent="0" marL="0">
               <a:buNone/>
             </a:pPr>
             <a:r>
@@ -5535,7 +5535,7 @@
           <a:bodyPr wrap="square" lIns="0" tIns="0" rIns="0" bIns="0" rtlCol="0" anchor="ctr"/>
           <a:lstStyle/>
           <a:p>
-            <a:pPr algn="ctr" indent="0" marL="0">
+            <a:pPr eaLnBrk="0" algn="ctr" indent="0" marL="0">
               <a:buNone/>
             </a:pPr>
             <a:r>
@@ -5574,7 +5574,7 @@
           <a:bodyPr wrap="square" lIns="0" tIns="0" rIns="0" bIns="0" rtlCol="0" anchor="ctr"/>
           <a:lstStyle/>
           <a:p>
-            <a:pPr algn="l" indent="0" marL="0">
+            <a:pPr eaLnBrk="0" algn="l" indent="0" marL="0">
               <a:buNone/>
             </a:pPr>
             <a:r>
@@ -5591,7 +5591,7 @@
             <a:endParaRPr lang="ko-KR" sz="2800" dirty="0"/>
           </a:p>
           <a:p>
-            <a:pPr algn="l" indent="0" marL="0">
+            <a:pPr eaLnBrk="0" algn="l" indent="0" marL="0">
               <a:buNone/>
             </a:pPr>
             <a:r>
@@ -5638,7 +5638,7 @@
           <a:bodyPr wrap="square" lIns="0" tIns="0" rIns="0" bIns="0" rtlCol="0" anchor="ctr"/>
           <a:lstStyle/>
           <a:p>
-            <a:pPr algn="ctr" indent="0" marL="0">
+            <a:pPr eaLnBrk="0" algn="ctr" indent="0" marL="0">
               <a:buNone/>
             </a:pPr>
             <a:r>
@@ -5677,7 +5677,7 @@
           <a:bodyPr wrap="square" lIns="0" tIns="0" rIns="0" bIns="0" rtlCol="0" anchor="ctr"/>
           <a:lstStyle/>
           <a:p>
-            <a:pPr algn="l" indent="0" marL="0">
+            <a:pPr eaLnBrk="0" algn="l" indent="0" marL="0">
               <a:buNone/>
             </a:pPr>
             <a:r>
@@ -5694,7 +5694,7 @@
             <a:endParaRPr lang="ko-KR" sz="2800" dirty="0"/>
           </a:p>
           <a:p>
-            <a:pPr algn="l" indent="0" marL="0">
+            <a:pPr eaLnBrk="0" algn="l" indent="0" marL="0">
               <a:buNone/>
             </a:pPr>
             <a:r>
@@ -5741,7 +5741,7 @@
           <a:bodyPr wrap="square" lIns="0" tIns="0" rIns="0" bIns="0" rtlCol="0" anchor="ctr"/>
           <a:lstStyle/>
           <a:p>
-            <a:pPr algn="ctr" indent="0" marL="0">
+            <a:pPr eaLnBrk="0" algn="ctr" indent="0" marL="0">
               <a:buNone/>
             </a:pPr>
             <a:r>
@@ -5780,7 +5780,7 @@
           <a:bodyPr wrap="square" lIns="0" tIns="0" rIns="0" bIns="0" rtlCol="0" anchor="ctr"/>
           <a:lstStyle/>
           <a:p>
-            <a:pPr algn="l" indent="0" marL="0">
+            <a:pPr eaLnBrk="0" algn="l" indent="0" marL="0">
               <a:buNone/>
             </a:pPr>
             <a:r>
@@ -5797,7 +5797,7 @@
             <a:endParaRPr lang="ko-KR" sz="2800" dirty="0"/>
           </a:p>
           <a:p>
-            <a:pPr algn="l" indent="0" marL="0">
+            <a:pPr eaLnBrk="0" algn="l" indent="0" marL="0">
               <a:buNone/>
             </a:pPr>
             <a:r>
@@ -5844,7 +5844,7 @@
           <a:bodyPr wrap="square" lIns="0" tIns="0" rIns="0" bIns="0" rtlCol="0" anchor="ctr"/>
           <a:lstStyle/>
           <a:p>
-            <a:pPr algn="ctr" indent="0" marL="0">
+            <a:pPr eaLnBrk="0" algn="ctr" indent="0" marL="0">
               <a:buNone/>
             </a:pPr>
             <a:r>
@@ -5883,7 +5883,7 @@
           <a:bodyPr wrap="square" lIns="0" tIns="0" rIns="0" bIns="0" rtlCol="0" anchor="ctr"/>
           <a:lstStyle/>
           <a:p>
-            <a:pPr algn="l" indent="0" marL="0">
+            <a:pPr eaLnBrk="0" algn="l" indent="0" marL="0">
               <a:buNone/>
             </a:pPr>
             <a:r>
@@ -5900,7 +5900,7 @@
             <a:endParaRPr lang="ko-KR" sz="2800" dirty="0"/>
           </a:p>
           <a:p>
-            <a:pPr algn="l" indent="0" marL="0">
+            <a:pPr eaLnBrk="0" algn="l" indent="0" marL="0">
               <a:buNone/>
             </a:pPr>
             <a:r>
@@ -5957,7 +5957,7 @@
             </a:lvl1pPr>
           </a:lstStyle>
           <a:p>
-            <a:pPr algn="r"/>
+            <a:pPr eaLnBrk="0" algn="r"/>
             <a:fld id="{F7021451-1387-4CA6-816F-3879F97B5CBC}" type="slidenum">
               <a:rPr b="0" lang="en-US"/>
               <a:t>12</a:t>
@@ -6014,7 +6014,7 @@
           <a:bodyPr wrap="square" lIns="0" tIns="0" rIns="0" bIns="0" rtlCol="0" anchor="ctr"/>
           <a:lstStyle/>
           <a:p>
-            <a:pPr algn="l" indent="0" marL="0">
+            <a:pPr eaLnBrk="0" algn="l" indent="0" marL="0">
               <a:buNone/>
             </a:pPr>
             <a:r>
@@ -6080,7 +6080,7 @@
           <a:bodyPr wrap="square" lIns="0" tIns="0" rIns="0" bIns="0" rtlCol="0" anchor="ctr"/>
           <a:lstStyle/>
           <a:p>
-            <a:pPr indent="0" marL="0">
+            <a:pPr eaLnBrk="0" indent="0" marL="0">
               <a:spcAft>
                 <a:spcPts val="600"/>
               </a:spcAft>
@@ -6130,7 +6130,7 @@
           <a:bodyPr wrap="square" lIns="177800" tIns="0" rIns="177800" bIns="0" rtlCol="0" anchor="ctr"/>
           <a:lstStyle/>
           <a:p>
-            <a:pPr algn="l" indent="0" marL="0">
+            <a:pPr eaLnBrk="0" algn="l" indent="0" marL="0">
               <a:buNone/>
             </a:pPr>
             <a:r>
@@ -6169,7 +6169,7 @@
           <a:bodyPr wrap="square" lIns="0" tIns="0" rIns="0" bIns="0" rtlCol="0" anchor="ctr"/>
           <a:lstStyle/>
           <a:p>
-            <a:pPr algn="l" indent="0" marL="0">
+            <a:pPr eaLnBrk="0" algn="l" indent="0" marL="0">
               <a:buNone/>
             </a:pPr>
             <a:r>
@@ -6208,7 +6208,7 @@
           <a:bodyPr wrap="square" lIns="0" tIns="0" rIns="0" bIns="0" rtlCol="0" anchor="ctr"/>
           <a:lstStyle/>
           <a:p>
-            <a:pPr algn="l" indent="0" marL="0">
+            <a:pPr eaLnBrk="0" algn="l" indent="0" marL="0">
               <a:buNone/>
             </a:pPr>
             <a:r>
@@ -6247,7 +6247,7 @@
           <a:bodyPr wrap="square" lIns="0" tIns="0" rIns="0" bIns="0" rtlCol="0" anchor="ctr"/>
           <a:lstStyle/>
           <a:p>
-            <a:pPr algn="l" indent="0" marL="0">
+            <a:pPr eaLnBrk="0" algn="l" indent="0" marL="0">
               <a:buNone/>
             </a:pPr>
             <a:r>
@@ -6286,7 +6286,7 @@
           <a:bodyPr wrap="square" lIns="0" tIns="0" rIns="0" bIns="0" rtlCol="0" anchor="ctr"/>
           <a:lstStyle/>
           <a:p>
-            <a:pPr algn="l" indent="0" marL="0">
+            <a:pPr eaLnBrk="0" algn="l" indent="0" marL="0">
               <a:buNone/>
             </a:pPr>
             <a:r>
@@ -6325,7 +6325,7 @@
           <a:bodyPr wrap="square" lIns="0" tIns="0" rIns="0" bIns="0" rtlCol="0" anchor="ctr"/>
           <a:lstStyle/>
           <a:p>
-            <a:pPr algn="l" indent="0" marL="0">
+            <a:pPr eaLnBrk="0" algn="l" indent="0" marL="0">
               <a:buNone/>
             </a:pPr>
             <a:r>
@@ -6364,7 +6364,7 @@
           <a:bodyPr wrap="square" lIns="0" tIns="0" rIns="0" bIns="0" rtlCol="0" anchor="ctr"/>
           <a:lstStyle/>
           <a:p>
-            <a:pPr algn="l" indent="0" marL="0">
+            <a:pPr eaLnBrk="0" algn="l" indent="0" marL="0">
               <a:buNone/>
             </a:pPr>
             <a:r>
@@ -6403,7 +6403,7 @@
           <a:bodyPr wrap="square" lIns="0" tIns="0" rIns="0" bIns="0" rtlCol="0" anchor="ctr"/>
           <a:lstStyle/>
           <a:p>
-            <a:pPr algn="l" indent="0" marL="0">
+            <a:pPr eaLnBrk="0" algn="l" indent="0" marL="0">
               <a:buNone/>
             </a:pPr>
             <a:r>
@@ -6442,7 +6442,7 @@
           <a:bodyPr wrap="square" lIns="0" tIns="0" rIns="0" bIns="0" rtlCol="0" anchor="ctr"/>
           <a:lstStyle/>
           <a:p>
-            <a:pPr algn="l" indent="0" marL="0">
+            <a:pPr eaLnBrk="0" algn="l" indent="0" marL="0">
               <a:buNone/>
             </a:pPr>
             <a:r>
@@ -6489,7 +6489,7 @@
           <a:bodyPr wrap="square" lIns="177800" tIns="0" rIns="177800" bIns="0" rtlCol="0" anchor="ctr"/>
           <a:lstStyle/>
           <a:p>
-            <a:pPr algn="l" indent="0" marL="0">
+            <a:pPr eaLnBrk="0" algn="l" indent="0" marL="0">
               <a:buNone/>
             </a:pPr>
             <a:r>
@@ -6528,7 +6528,7 @@
           <a:bodyPr wrap="square" lIns="0" tIns="0" rIns="0" bIns="0" rtlCol="0" anchor="ctr"/>
           <a:lstStyle/>
           <a:p>
-            <a:pPr algn="l" indent="0" marL="0">
+            <a:pPr eaLnBrk="0" algn="l" indent="0" marL="0">
               <a:buNone/>
             </a:pPr>
             <a:r>
@@ -6567,7 +6567,7 @@
           <a:bodyPr wrap="square" lIns="0" tIns="0" rIns="0" bIns="0" rtlCol="0" anchor="ctr"/>
           <a:lstStyle/>
           <a:p>
-            <a:pPr algn="l" indent="0" marL="0">
+            <a:pPr eaLnBrk="0" algn="l" indent="0" marL="0">
               <a:buNone/>
             </a:pPr>
             <a:r>
@@ -6584,7 +6584,7 @@
             <a:endParaRPr lang="ko-KR" sz="2200" dirty="0"/>
           </a:p>
           <a:p>
-            <a:pPr algn="l" indent="0" marL="0">
+            <a:pPr eaLnBrk="0" algn="l" indent="0" marL="0">
               <a:buNone/>
             </a:pPr>
             <a:r>
@@ -6623,7 +6623,7 @@
           <a:bodyPr wrap="square" lIns="0" tIns="0" rIns="0" bIns="0" rtlCol="0" anchor="ctr"/>
           <a:lstStyle/>
           <a:p>
-            <a:pPr algn="l" indent="0" marL="0">
+            <a:pPr eaLnBrk="0" algn="l" indent="0" marL="0">
               <a:buNone/>
             </a:pPr>
             <a:r>
@@ -6662,7 +6662,7 @@
           <a:bodyPr wrap="square" lIns="0" tIns="0" rIns="0" bIns="0" rtlCol="0" anchor="ctr"/>
           <a:lstStyle/>
           <a:p>
-            <a:pPr algn="l" indent="0" marL="0">
+            <a:pPr eaLnBrk="0" algn="l" indent="0" marL="0">
               <a:buNone/>
             </a:pPr>
             <a:r>
@@ -6679,7 +6679,7 @@
             <a:endParaRPr lang="ko-KR" sz="2200" dirty="0"/>
           </a:p>
           <a:p>
-            <a:pPr algn="l" indent="0" marL="0">
+            <a:pPr eaLnBrk="0" algn="l" indent="0" marL="0">
               <a:buNone/>
             </a:pPr>
             <a:r>
@@ -6736,7 +6736,7 @@
             </a:lvl1pPr>
           </a:lstStyle>
           <a:p>
-            <a:pPr algn="r"/>
+            <a:pPr eaLnBrk="0" algn="r"/>
             <a:fld id="{F7021451-1387-4CA6-816F-3879F97B5CBC}" type="slidenum">
               <a:rPr b="0" lang="en-US"/>
               <a:t>13</a:t>
@@ -6793,7 +6793,7 @@
           <a:bodyPr wrap="square" lIns="0" tIns="0" rIns="0" bIns="0" rtlCol="0" anchor="ctr"/>
           <a:lstStyle/>
           <a:p>
-            <a:pPr algn="l" indent="0" marL="0">
+            <a:pPr eaLnBrk="0" algn="l" indent="0" marL="0">
               <a:buNone/>
             </a:pPr>
             <a:r>
@@ -6832,7 +6832,7 @@
           <a:bodyPr wrap="square" lIns="0" tIns="0" rIns="0" bIns="0" rtlCol="0" anchor="ctr"/>
           <a:lstStyle/>
           <a:p>
-            <a:pPr algn="l" indent="0" marL="0">
+            <a:pPr eaLnBrk="0" algn="l" indent="0" marL="0">
               <a:buNone/>
             </a:pPr>
             <a:r>
@@ -6898,7 +6898,7 @@
           <a:bodyPr wrap="square" lIns="0" tIns="0" rIns="0" bIns="0" rtlCol="0" anchor="ctr"/>
           <a:lstStyle/>
           <a:p>
-            <a:pPr indent="0" marL="0">
+            <a:pPr eaLnBrk="0" indent="0" marL="0">
               <a:spcAft>
                 <a:spcPts val="600"/>
               </a:spcAft>
@@ -6948,7 +6948,7 @@
           <a:bodyPr wrap="square" lIns="0" tIns="0" rIns="0" bIns="0" rtlCol="0" anchor="ctr"/>
           <a:lstStyle/>
           <a:p>
-            <a:pPr algn="ctr" indent="0" marL="0">
+            <a:pPr eaLnBrk="0" algn="ctr" indent="0" marL="0">
               <a:buNone/>
             </a:pPr>
             <a:r>
@@ -7014,7 +7014,7 @@
           <a:bodyPr wrap="square" lIns="0" tIns="0" rIns="0" bIns="0" rtlCol="0" anchor="ctr"/>
           <a:lstStyle/>
           <a:p>
-            <a:pPr indent="0" marL="0">
+            <a:pPr eaLnBrk="0" indent="0" marL="0">
               <a:spcAft>
                 <a:spcPts val="600"/>
               </a:spcAft>
@@ -7064,7 +7064,7 @@
           <a:bodyPr wrap="square" lIns="0" tIns="0" rIns="0" bIns="0" rtlCol="0" anchor="ctr"/>
           <a:lstStyle/>
           <a:p>
-            <a:pPr algn="ctr" indent="0" marL="0">
+            <a:pPr eaLnBrk="0" algn="ctr" indent="0" marL="0">
               <a:buNone/>
             </a:pPr>
             <a:r>
@@ -7130,7 +7130,7 @@
           <a:bodyPr wrap="square" lIns="0" tIns="0" rIns="0" bIns="0" rtlCol="0" anchor="ctr"/>
           <a:lstStyle/>
           <a:p>
-            <a:pPr indent="0" marL="0">
+            <a:pPr eaLnBrk="0" indent="0" marL="0">
               <a:spcAft>
                 <a:spcPts val="600"/>
               </a:spcAft>
@@ -7180,7 +7180,7 @@
           <a:bodyPr wrap="square" lIns="0" tIns="0" rIns="0" bIns="0" rtlCol="0" anchor="ctr"/>
           <a:lstStyle/>
           <a:p>
-            <a:pPr algn="ctr" indent="0" marL="0">
+            <a:pPr eaLnBrk="0" algn="ctr" indent="0" marL="0">
               <a:buNone/>
             </a:pPr>
             <a:r>
@@ -7246,7 +7246,7 @@
           <a:bodyPr wrap="square" lIns="0" tIns="0" rIns="0" bIns="0" rtlCol="0" anchor="ctr"/>
           <a:lstStyle/>
           <a:p>
-            <a:pPr indent="0" marL="0">
+            <a:pPr eaLnBrk="0" indent="0" marL="0">
               <a:spcAft>
                 <a:spcPts val="600"/>
               </a:spcAft>
@@ -7306,7 +7306,7 @@
             </a:lvl1pPr>
           </a:lstStyle>
           <a:p>
-            <a:pPr algn="r"/>
+            <a:pPr eaLnBrk="0" algn="r"/>
             <a:fld id="{F7021451-1387-4CA6-816F-3879F97B5CBC}" type="slidenum">
               <a:rPr b="0" lang="en-US"/>
               <a:t>14</a:t>
@@ -7363,7 +7363,7 @@
           <a:bodyPr wrap="square" lIns="0" tIns="0" rIns="0" bIns="0" rtlCol="0" anchor="ctr"/>
           <a:lstStyle/>
           <a:p>
-            <a:pPr algn="l" indent="0" marL="0">
+            <a:pPr eaLnBrk="0" algn="l" indent="0" marL="0">
               <a:buNone/>
             </a:pPr>
             <a:r>
@@ -7429,7 +7429,7 @@
           <a:bodyPr wrap="square" lIns="0" tIns="0" rIns="0" bIns="0" rtlCol="0" anchor="ctr"/>
           <a:lstStyle/>
           <a:p>
-            <a:pPr indent="0" marL="0">
+            <a:pPr eaLnBrk="0" indent="0" marL="0">
               <a:spcAft>
                 <a:spcPts val="600"/>
               </a:spcAft>
@@ -7449,7 +7449,7 @@
             <a:endParaRPr lang="ko-KR" sz="2800" dirty="0"/>
           </a:p>
           <a:p>
-            <a:pPr indent="0" marL="0">
+            <a:pPr eaLnBrk="0" indent="0" marL="0">
               <a:spcAft>
                 <a:spcPts val="600"/>
               </a:spcAft>
@@ -7499,7 +7499,7 @@
           <a:bodyPr wrap="square" lIns="177800" tIns="0" rIns="177800" bIns="0" rtlCol="0" anchor="ctr"/>
           <a:lstStyle/>
           <a:p>
-            <a:pPr algn="l" indent="0" marL="0">
+            <a:pPr eaLnBrk="0" algn="l" indent="0" marL="0">
               <a:buNone/>
             </a:pPr>
             <a:r>
@@ -7546,7 +7546,7 @@
           <a:bodyPr wrap="square" lIns="177800" tIns="0" rIns="177800" bIns="0" rtlCol="0" anchor="ctr"/>
           <a:lstStyle/>
           <a:p>
-            <a:pPr algn="l" indent="0" marL="0">
+            <a:pPr eaLnBrk="0" algn="l" indent="0" marL="0">
               <a:buNone/>
             </a:pPr>
             <a:r>
@@ -7585,7 +7585,7 @@
           <a:bodyPr wrap="square" lIns="0" tIns="0" rIns="0" bIns="0" rtlCol="0" anchor="t"/>
           <a:lstStyle/>
           <a:p>
-            <a:pPr algn="l" indent="0" marL="0">
+            <a:pPr eaLnBrk="0" algn="l" indent="0" marL="0">
               <a:buNone/>
             </a:pPr>
             <a:r>
@@ -7624,7 +7624,7 @@
           <a:bodyPr wrap="square" lIns="0" tIns="0" rIns="0" bIns="0" rtlCol="0" anchor="ctr"/>
           <a:lstStyle/>
           <a:p>
-            <a:pPr algn="l" indent="0" marL="0">
+            <a:pPr eaLnBrk="0" algn="l" indent="0" marL="0">
               <a:buNone/>
             </a:pPr>
             <a:r>
@@ -7641,7 +7641,7 @@
             <a:endParaRPr lang="ko-KR" sz="2200" dirty="0"/>
           </a:p>
           <a:p>
-            <a:pPr algn="l" indent="0" marL="0">
+            <a:pPr eaLnBrk="0" algn="l" indent="0" marL="0">
               <a:buNone/>
             </a:pPr>
             <a:r>
@@ -7680,7 +7680,7 @@
           <a:bodyPr wrap="square" lIns="0" tIns="0" rIns="0" bIns="0" rtlCol="0" anchor="ctr"/>
           <a:lstStyle/>
           <a:p>
-            <a:pPr algn="l" indent="0" marL="0">
+            <a:pPr eaLnBrk="0" algn="l" indent="0" marL="0">
               <a:buNone/>
             </a:pPr>
             <a:r>
@@ -7697,7 +7697,7 @@
             <a:endParaRPr lang="ko-KR" sz="2200" dirty="0"/>
           </a:p>
           <a:p>
-            <a:pPr algn="l" indent="0" marL="0">
+            <a:pPr eaLnBrk="0" algn="l" indent="0" marL="0">
               <a:buNone/>
             </a:pPr>
             <a:r>
@@ -7736,7 +7736,7 @@
           <a:bodyPr wrap="square" lIns="0" tIns="0" rIns="0" bIns="0" rtlCol="0" anchor="ctr"/>
           <a:lstStyle/>
           <a:p>
-            <a:pPr algn="l" indent="0" marL="0">
+            <a:pPr eaLnBrk="0" algn="l" indent="0" marL="0">
               <a:buNone/>
             </a:pPr>
             <a:r>
@@ -7753,7 +7753,7 @@
             <a:endParaRPr lang="ko-KR" sz="2200" dirty="0"/>
           </a:p>
           <a:p>
-            <a:pPr algn="l" indent="0" marL="0">
+            <a:pPr eaLnBrk="0" algn="l" indent="0" marL="0">
               <a:buNone/>
             </a:pPr>
             <a:r>
@@ -7792,7 +7792,7 @@
           <a:bodyPr wrap="square" lIns="0" tIns="0" rIns="0" bIns="0" rtlCol="0" anchor="ctr"/>
           <a:lstStyle/>
           <a:p>
-            <a:pPr algn="l" indent="0" marL="0">
+            <a:pPr eaLnBrk="0" algn="l" indent="0" marL="0">
               <a:buNone/>
             </a:pPr>
             <a:r>
@@ -7849,7 +7849,7 @@
             </a:lvl1pPr>
           </a:lstStyle>
           <a:p>
-            <a:pPr algn="r"/>
+            <a:pPr eaLnBrk="0" algn="r"/>
             <a:fld id="{F7021451-1387-4CA6-816F-3879F97B5CBC}" type="slidenum">
               <a:rPr b="0" lang="en-US"/>
               <a:t>15</a:t>
@@ -7906,7 +7906,7 @@
           <a:bodyPr wrap="square" lIns="0" tIns="0" rIns="0" bIns="0" rtlCol="0" anchor="ctr"/>
           <a:lstStyle/>
           <a:p>
-            <a:pPr algn="l" indent="0" marL="0">
+            <a:pPr eaLnBrk="0" algn="l" indent="0" marL="0">
               <a:buNone/>
             </a:pPr>
             <a:r>
@@ -7945,7 +7945,7 @@
           <a:bodyPr wrap="square" lIns="0" tIns="0" rIns="0" bIns="0" rtlCol="0" anchor="ctr"/>
           <a:lstStyle/>
           <a:p>
-            <a:pPr algn="l" indent="0" marL="0">
+            <a:pPr eaLnBrk="0" algn="l" indent="0" marL="0">
               <a:buNone/>
             </a:pPr>
             <a:r>
@@ -8011,7 +8011,7 @@
           <a:bodyPr wrap="square" lIns="0" tIns="0" rIns="0" bIns="0" rtlCol="0" anchor="ctr"/>
           <a:lstStyle/>
           <a:p>
-            <a:pPr indent="0" marL="0">
+            <a:pPr eaLnBrk="0" indent="0" marL="0">
               <a:spcAft>
                 <a:spcPts val="600"/>
               </a:spcAft>
@@ -8080,7 +8080,7 @@
           <a:bodyPr wrap="square" lIns="0" tIns="0" rIns="0" bIns="0" rtlCol="0" anchor="ctr"/>
           <a:lstStyle/>
           <a:p>
-            <a:pPr indent="0" marL="0">
+            <a:pPr eaLnBrk="0" indent="0" marL="0">
               <a:spcAft>
                 <a:spcPts val="600"/>
               </a:spcAft>
@@ -8100,7 +8100,7 @@
             <a:endParaRPr lang="ko-KR" sz="2200" dirty="0"/>
           </a:p>
           <a:p>
-            <a:pPr indent="0" marL="0">
+            <a:pPr eaLnBrk="0" indent="0" marL="0">
               <a:spcAft>
                 <a:spcPts val="600"/>
               </a:spcAft>
@@ -8120,7 +8120,7 @@
             <a:endParaRPr lang="ko-KR" sz="2200" dirty="0"/>
           </a:p>
           <a:p>
-            <a:pPr indent="0" marL="0">
+            <a:pPr eaLnBrk="0" indent="0" marL="0">
               <a:spcAft>
                 <a:spcPts val="600"/>
               </a:spcAft>
@@ -8189,7 +8189,7 @@
           <a:bodyPr wrap="square" lIns="0" tIns="0" rIns="0" bIns="0" rtlCol="0" anchor="ctr"/>
           <a:lstStyle/>
           <a:p>
-            <a:pPr indent="0" marL="0">
+            <a:pPr eaLnBrk="0" indent="0" marL="0">
               <a:spcAft>
                 <a:spcPts val="600"/>
               </a:spcAft>
@@ -8209,7 +8209,7 @@
             <a:endParaRPr lang="ko-KR" sz="2200" dirty="0"/>
           </a:p>
           <a:p>
-            <a:pPr indent="0" marL="0">
+            <a:pPr eaLnBrk="0" indent="0" marL="0">
               <a:spcAft>
                 <a:spcPts val="600"/>
               </a:spcAft>
@@ -8229,7 +8229,7 @@
             <a:endParaRPr lang="ko-KR" sz="2200" dirty="0"/>
           </a:p>
           <a:p>
-            <a:pPr indent="0" marL="0">
+            <a:pPr eaLnBrk="0" indent="0" marL="0">
               <a:spcAft>
                 <a:spcPts val="600"/>
               </a:spcAft>
@@ -8298,7 +8298,7 @@
           <a:bodyPr wrap="square" lIns="0" tIns="0" rIns="0" bIns="0" rtlCol="0" anchor="ctr"/>
           <a:lstStyle/>
           <a:p>
-            <a:pPr indent="0" marL="0">
+            <a:pPr eaLnBrk="0" indent="0" marL="0">
               <a:spcAft>
                 <a:spcPts val="600"/>
               </a:spcAft>
@@ -8318,7 +8318,7 @@
             <a:endParaRPr lang="ko-KR" sz="2200" dirty="0"/>
           </a:p>
           <a:p>
-            <a:pPr indent="0" marL="0">
+            <a:pPr eaLnBrk="0" indent="0" marL="0">
               <a:spcAft>
                 <a:spcPts val="600"/>
               </a:spcAft>
@@ -8338,7 +8338,7 @@
             <a:endParaRPr lang="ko-KR" sz="2200" dirty="0"/>
           </a:p>
           <a:p>
-            <a:pPr indent="0" marL="0">
+            <a:pPr eaLnBrk="0" indent="0" marL="0">
               <a:spcAft>
                 <a:spcPts val="600"/>
               </a:spcAft>
@@ -8407,7 +8407,7 @@
           <a:bodyPr wrap="square" lIns="0" tIns="0" rIns="0" bIns="0" rtlCol="0" anchor="ctr"/>
           <a:lstStyle/>
           <a:p>
-            <a:pPr indent="0" marL="0">
+            <a:pPr eaLnBrk="0" indent="0" marL="0">
               <a:spcAft>
                 <a:spcPts val="600"/>
               </a:spcAft>
@@ -8427,7 +8427,7 @@
             <a:endParaRPr lang="ko-KR" sz="2200" dirty="0"/>
           </a:p>
           <a:p>
-            <a:pPr indent="0" marL="0">
+            <a:pPr eaLnBrk="0" indent="0" marL="0">
               <a:spcAft>
                 <a:spcPts val="600"/>
               </a:spcAft>
@@ -8447,7 +8447,7 @@
             <a:endParaRPr lang="ko-KR" sz="2200" dirty="0"/>
           </a:p>
           <a:p>
-            <a:pPr indent="0" marL="0">
+            <a:pPr eaLnBrk="0" indent="0" marL="0">
               <a:spcAft>
                 <a:spcPts val="600"/>
               </a:spcAft>
@@ -8507,7 +8507,7 @@
             </a:lvl1pPr>
           </a:lstStyle>
           <a:p>
-            <a:pPr algn="r"/>
+            <a:pPr eaLnBrk="0" algn="r"/>
             <a:fld id="{F7021451-1387-4CA6-816F-3879F97B5CBC}" type="slidenum">
               <a:rPr b="0" lang="en-US"/>
               <a:t>16</a:t>
@@ -8564,7 +8564,7 @@
           <a:bodyPr wrap="square" lIns="0" tIns="0" rIns="0" bIns="0" rtlCol="0" anchor="ctr"/>
           <a:lstStyle/>
           <a:p>
-            <a:pPr algn="l" indent="0" marL="0">
+            <a:pPr eaLnBrk="0" algn="l" indent="0" marL="0">
               <a:buNone/>
             </a:pPr>
             <a:r>
@@ -8611,7 +8611,7 @@
           <a:bodyPr wrap="square" lIns="0" tIns="0" rIns="0" bIns="0" rtlCol="0" anchor="ctr"/>
           <a:lstStyle/>
           <a:p>
-            <a:pPr algn="ctr" indent="0" marL="0">
+            <a:pPr eaLnBrk="0" algn="ctr" indent="0" marL="0">
               <a:buNone/>
             </a:pPr>
             <a:r>
@@ -8650,7 +8650,7 @@
           <a:bodyPr wrap="square" lIns="0" tIns="0" rIns="0" bIns="0" rtlCol="0" anchor="ctr"/>
           <a:lstStyle/>
           <a:p>
-            <a:pPr algn="l" indent="0" marL="0">
+            <a:pPr eaLnBrk="0" algn="l" indent="0" marL="0">
               <a:buNone/>
             </a:pPr>
             <a:r>
@@ -8697,7 +8697,7 @@
           <a:bodyPr wrap="square" lIns="0" tIns="0" rIns="0" bIns="0" rtlCol="0" anchor="ctr"/>
           <a:lstStyle/>
           <a:p>
-            <a:pPr algn="ctr" indent="0" marL="0">
+            <a:pPr eaLnBrk="0" algn="ctr" indent="0" marL="0">
               <a:buNone/>
             </a:pPr>
             <a:r>
@@ -8736,7 +8736,7 @@
           <a:bodyPr wrap="square" lIns="0" tIns="0" rIns="0" bIns="0" rtlCol="0" anchor="ctr"/>
           <a:lstStyle/>
           <a:p>
-            <a:pPr algn="l" indent="0" marL="0">
+            <a:pPr eaLnBrk="0" algn="l" indent="0" marL="0">
               <a:buNone/>
             </a:pPr>
             <a:r>
@@ -8783,7 +8783,7 @@
           <a:bodyPr wrap="square" lIns="0" tIns="0" rIns="0" bIns="0" rtlCol="0" anchor="ctr"/>
           <a:lstStyle/>
           <a:p>
-            <a:pPr algn="ctr" indent="0" marL="0">
+            <a:pPr eaLnBrk="0" algn="ctr" indent="0" marL="0">
               <a:buNone/>
             </a:pPr>
             <a:r>
@@ -8822,7 +8822,7 @@
           <a:bodyPr wrap="square" lIns="0" tIns="0" rIns="0" bIns="0" rtlCol="0" anchor="ctr"/>
           <a:lstStyle/>
           <a:p>
-            <a:pPr algn="l" indent="0" marL="0">
+            <a:pPr eaLnBrk="0" algn="l" indent="0" marL="0">
               <a:buNone/>
             </a:pPr>
             <a:r>
@@ -8879,7 +8879,7 @@
             </a:lvl1pPr>
           </a:lstStyle>
           <a:p>
-            <a:pPr algn="r"/>
+            <a:pPr eaLnBrk="0" algn="r"/>
             <a:fld id="{F7021451-1387-4CA6-816F-3879F97B5CBC}" type="slidenum">
               <a:rPr b="0" lang="en-US"/>
               <a:t>2</a:t>
@@ -8936,7 +8936,7 @@
           <a:bodyPr wrap="square" lIns="0" tIns="0" rIns="0" bIns="0" rtlCol="0" anchor="ctr"/>
           <a:lstStyle/>
           <a:p>
-            <a:pPr algn="l" indent="0" marL="0">
+            <a:pPr eaLnBrk="0" algn="l" indent="0" marL="0">
               <a:buNone/>
             </a:pPr>
             <a:r>
@@ -9002,7 +9002,7 @@
           <a:bodyPr wrap="square" lIns="0" tIns="0" rIns="0" bIns="0" rtlCol="0" anchor="ctr"/>
           <a:lstStyle/>
           <a:p>
-            <a:pPr indent="0" marL="0">
+            <a:pPr eaLnBrk="0" indent="0" marL="0">
               <a:spcAft>
                 <a:spcPts val="600"/>
               </a:spcAft>
@@ -9025,7 +9025,7 @@
       </p:sp>
       <p:sp>
         <p:nvSpPr>
-          <p:cNvPr id="5" name="S03-figure22"/>
+          <p:cNvPr id="5" name="S03-figure22" descr="손바닥이 위를 향한 팔의 손목 안쪽 엄지 쪽(빨간 점)에 다른 손의 두 손가락(검지·중지)을 가볍게 대는 그림"/>
           <p:cNvSpPr/>
           <p:nvPr/>
         </p:nvSpPr>
@@ -9219,7 +9219,7 @@
           <a:bodyPr wrap="square" lIns="0" tIns="0" rIns="0" bIns="0" rtlCol="0" anchor="ctr"/>
           <a:lstStyle/>
           <a:p>
-            <a:pPr algn="ctr" indent="0" marL="0">
+            <a:pPr eaLnBrk="0" algn="ctr" indent="0" marL="0">
               <a:buNone/>
             </a:pPr>
             <a:r>
@@ -9258,7 +9258,7 @@
           <a:bodyPr wrap="square" lIns="0" tIns="0" rIns="0" bIns="0" rtlCol="0" anchor="ctr"/>
           <a:lstStyle/>
           <a:p>
-            <a:pPr algn="ctr" indent="0" marL="0">
+            <a:pPr eaLnBrk="0" algn="ctr" indent="0" marL="0">
               <a:buNone/>
             </a:pPr>
             <a:r>
@@ -9297,7 +9297,7 @@
           <a:bodyPr wrap="square" lIns="0" tIns="0" rIns="0" bIns="0" rtlCol="0" anchor="ctr"/>
           <a:lstStyle/>
           <a:p>
-            <a:pPr algn="ctr" indent="0" marL="0">
+            <a:pPr eaLnBrk="0" algn="ctr" indent="0" marL="0">
               <a:buNone/>
             </a:pPr>
             <a:r>
@@ -9342,7 +9342,7 @@
           <a:bodyPr wrap="square" lIns="0" tIns="0" rIns="0" bIns="0" rtlCol="0" anchor="ctr"/>
           <a:lstStyle/>
           <a:p>
-            <a:pPr algn="ctr" indent="0" marL="0">
+            <a:pPr eaLnBrk="0" algn="ctr" indent="0" marL="0">
               <a:buNone/>
             </a:pPr>
             <a:r>
@@ -9381,7 +9381,7 @@
           <a:bodyPr wrap="square" lIns="0" tIns="0" rIns="0" bIns="0" rtlCol="0" anchor="t"/>
           <a:lstStyle/>
           <a:p>
-            <a:pPr algn="l" indent="0" marL="0">
+            <a:pPr eaLnBrk="0" algn="l" indent="0" marL="0">
               <a:buNone/>
             </a:pPr>
             <a:r>
@@ -9398,7 +9398,7 @@
             <a:endParaRPr lang="ko-KR" sz="2800" dirty="0"/>
           </a:p>
           <a:p>
-            <a:pPr algn="l" indent="0" marL="0">
+            <a:pPr eaLnBrk="0" algn="l" indent="0" marL="0">
               <a:buNone/>
             </a:pPr>
             <a:r>
@@ -9443,7 +9443,7 @@
           <a:bodyPr wrap="square" lIns="0" tIns="0" rIns="0" bIns="0" rtlCol="0" anchor="ctr"/>
           <a:lstStyle/>
           <a:p>
-            <a:pPr algn="ctr" indent="0" marL="0">
+            <a:pPr eaLnBrk="0" algn="ctr" indent="0" marL="0">
               <a:buNone/>
             </a:pPr>
             <a:r>
@@ -9482,7 +9482,7 @@
           <a:bodyPr wrap="square" lIns="0" tIns="0" rIns="0" bIns="0" rtlCol="0" anchor="t"/>
           <a:lstStyle/>
           <a:p>
-            <a:pPr algn="l" indent="0" marL="0">
+            <a:pPr eaLnBrk="0" algn="l" indent="0" marL="0">
               <a:buNone/>
             </a:pPr>
             <a:r>
@@ -9527,7 +9527,7 @@
           <a:bodyPr wrap="square" lIns="0" tIns="0" rIns="0" bIns="0" rtlCol="0" anchor="ctr"/>
           <a:lstStyle/>
           <a:p>
-            <a:pPr algn="ctr" indent="0" marL="0">
+            <a:pPr eaLnBrk="0" algn="ctr" indent="0" marL="0">
               <a:buNone/>
             </a:pPr>
             <a:r>
@@ -9566,7 +9566,7 @@
           <a:bodyPr wrap="square" lIns="0" tIns="0" rIns="0" bIns="0" rtlCol="0" anchor="ctr"/>
           <a:lstStyle/>
           <a:p>
-            <a:pPr algn="l" indent="0" marL="0">
+            <a:pPr eaLnBrk="0" algn="l" indent="0" marL="0">
               <a:buNone/>
             </a:pPr>
             <a:r>
@@ -9583,7 +9583,7 @@
             <a:endParaRPr lang="ko-KR" sz="2800" dirty="0"/>
           </a:p>
           <a:p>
-            <a:pPr algn="l" indent="0" marL="0">
+            <a:pPr eaLnBrk="0" algn="l" indent="0" marL="0">
               <a:buNone/>
             </a:pPr>
             <a:r>
@@ -9622,7 +9622,7 @@
           <a:bodyPr wrap="square" lIns="0" tIns="0" rIns="0" bIns="0" rtlCol="0" anchor="ctr"/>
           <a:lstStyle/>
           <a:p>
-            <a:pPr algn="l" indent="0" marL="0">
+            <a:pPr eaLnBrk="0" algn="l" indent="0" marL="0">
               <a:buNone/>
             </a:pPr>
             <a:r>
@@ -9679,7 +9679,7 @@
             </a:lvl1pPr>
           </a:lstStyle>
           <a:p>
-            <a:pPr algn="r"/>
+            <a:pPr eaLnBrk="0" algn="r"/>
             <a:fld id="{F7021451-1387-4CA6-816F-3879F97B5CBC}" type="slidenum">
               <a:rPr b="0" lang="en-US"/>
               <a:t>3</a:t>
@@ -9736,7 +9736,7 @@
           <a:bodyPr wrap="square" lIns="0" tIns="0" rIns="0" bIns="0" rtlCol="0" anchor="ctr"/>
           <a:lstStyle/>
           <a:p>
-            <a:pPr algn="l" indent="0" marL="0">
+            <a:pPr eaLnBrk="0" algn="l" indent="0" marL="0">
               <a:buNone/>
             </a:pPr>
             <a:r>
@@ -9802,7 +9802,7 @@
           <a:bodyPr wrap="square" lIns="0" tIns="0" rIns="0" bIns="0" rtlCol="0" anchor="ctr"/>
           <a:lstStyle/>
           <a:p>
-            <a:pPr indent="0" marL="0">
+            <a:pPr eaLnBrk="0" indent="0" marL="0">
               <a:spcAft>
                 <a:spcPts val="600"/>
               </a:spcAft>
@@ -9852,7 +9852,7 @@
           <a:bodyPr wrap="square" lIns="0" tIns="0" rIns="0" bIns="0" rtlCol="0" anchor="ctr"/>
           <a:lstStyle/>
           <a:p>
-            <a:pPr algn="ctr" indent="0" marL="0">
+            <a:pPr eaLnBrk="0" algn="ctr" indent="0" marL="0">
               <a:buNone/>
             </a:pPr>
             <a:r>
@@ -9891,7 +9891,7 @@
           <a:bodyPr wrap="square" lIns="0" tIns="0" rIns="0" bIns="0" rtlCol="0" anchor="ctr"/>
           <a:lstStyle/>
           <a:p>
-            <a:pPr algn="l" indent="0" marL="0">
+            <a:pPr eaLnBrk="0" algn="l" indent="0" marL="0">
               <a:buNone/>
             </a:pPr>
             <a:r>
@@ -9938,7 +9938,7 @@
           <a:bodyPr wrap="square" lIns="0" tIns="0" rIns="0" bIns="0" rtlCol="0" anchor="ctr"/>
           <a:lstStyle/>
           <a:p>
-            <a:pPr algn="ctr" indent="0" marL="0">
+            <a:pPr eaLnBrk="0" algn="ctr" indent="0" marL="0">
               <a:buNone/>
             </a:pPr>
             <a:r>
@@ -9977,7 +9977,7 @@
           <a:bodyPr wrap="square" lIns="0" tIns="0" rIns="0" bIns="0" rtlCol="0" anchor="ctr"/>
           <a:lstStyle/>
           <a:p>
-            <a:pPr algn="l" indent="0" marL="0">
+            <a:pPr eaLnBrk="0" algn="l" indent="0" marL="0">
               <a:buNone/>
             </a:pPr>
             <a:r>
@@ -10024,7 +10024,7 @@
           <a:bodyPr wrap="square" lIns="0" tIns="0" rIns="0" bIns="0" rtlCol="0" anchor="ctr"/>
           <a:lstStyle/>
           <a:p>
-            <a:pPr algn="ctr" indent="0" marL="0">
+            <a:pPr eaLnBrk="0" algn="ctr" indent="0" marL="0">
               <a:buNone/>
             </a:pPr>
             <a:r>
@@ -10063,7 +10063,7 @@
           <a:bodyPr wrap="square" lIns="0" tIns="0" rIns="0" bIns="0" rtlCol="0" anchor="ctr"/>
           <a:lstStyle/>
           <a:p>
-            <a:pPr algn="l" indent="0" marL="0">
+            <a:pPr eaLnBrk="0" algn="l" indent="0" marL="0">
               <a:buNone/>
             </a:pPr>
             <a:r>
@@ -10120,7 +10120,7 @@
             </a:lvl1pPr>
           </a:lstStyle>
           <a:p>
-            <a:pPr algn="r"/>
+            <a:pPr eaLnBrk="0" algn="r"/>
             <a:fld id="{F7021451-1387-4CA6-816F-3879F97B5CBC}" type="slidenum">
               <a:rPr b="0" lang="en-US"/>
               <a:t>4</a:t>
@@ -10177,7 +10177,7 @@
           <a:bodyPr wrap="square" lIns="0" tIns="0" rIns="0" bIns="0" rtlCol="0" anchor="ctr"/>
           <a:lstStyle/>
           <a:p>
-            <a:pPr algn="l" indent="0" marL="0">
+            <a:pPr eaLnBrk="0" algn="l" indent="0" marL="0">
               <a:buNone/>
             </a:pPr>
             <a:r>
@@ -10216,7 +10216,7 @@
           <a:bodyPr wrap="square" lIns="0" tIns="0" rIns="0" bIns="0" rtlCol="0" anchor="ctr"/>
           <a:lstStyle/>
           <a:p>
-            <a:pPr algn="l" indent="0" marL="0">
+            <a:pPr eaLnBrk="0" algn="l" indent="0" marL="0">
               <a:buNone/>
             </a:pPr>
             <a:r>
@@ -10282,7 +10282,7 @@
           <a:bodyPr wrap="square" lIns="0" tIns="0" rIns="0" bIns="0" rtlCol="0" anchor="ctr"/>
           <a:lstStyle/>
           <a:p>
-            <a:pPr indent="0" marL="0">
+            <a:pPr eaLnBrk="0" indent="0" marL="0">
               <a:spcAft>
                 <a:spcPts val="600"/>
               </a:spcAft>
@@ -10336,7 +10336,7 @@
                     <a:bodyPr/>
                     <a:lstStyle/>
                     <a:p>
-                      <a:pPr algn="ctr" indent="0" marL="0">
+                      <a:pPr eaLnBrk="0" algn="ctr" indent="0" marL="0">
                         <a:buNone/>
                       </a:pPr>
                       <a:endParaRPr lang="en-US" sz="2600" dirty="0">
@@ -10393,7 +10393,7 @@
                     <a:bodyPr/>
                     <a:lstStyle/>
                     <a:p>
-                      <a:pPr algn="ctr" indent="0" marL="0">
+                      <a:pPr eaLnBrk="0" algn="ctr" indent="0" marL="0">
                         <a:buNone/>
                       </a:pPr>
                       <a:r>
@@ -10461,7 +10461,7 @@
                     <a:bodyPr/>
                     <a:lstStyle/>
                     <a:p>
-                      <a:pPr algn="ctr" indent="0" marL="0">
+                      <a:pPr eaLnBrk="0" algn="ctr" indent="0" marL="0">
                         <a:buNone/>
                       </a:pPr>
                       <a:r>
@@ -10531,7 +10531,7 @@
                     <a:bodyPr/>
                     <a:lstStyle/>
                     <a:p>
-                      <a:pPr algn="ctr" indent="0" marL="0">
+                      <a:pPr eaLnBrk="0" algn="ctr" indent="0" marL="0">
                         <a:buNone/>
                       </a:pPr>
                       <a:r>
@@ -10599,7 +10599,7 @@
                     <a:bodyPr/>
                     <a:lstStyle/>
                     <a:p>
-                      <a:pPr algn="ctr" indent="0" marL="0">
+                      <a:pPr eaLnBrk="0" algn="ctr" indent="0" marL="0">
                         <a:buNone/>
                       </a:pPr>
                       <a:endParaRPr lang="en-US" sz="2600" dirty="0">
@@ -10656,7 +10656,7 @@
                     <a:bodyPr/>
                     <a:lstStyle/>
                     <a:p>
-                      <a:pPr algn="ctr" indent="0" marL="0">
+                      <a:pPr eaLnBrk="0" algn="ctr" indent="0" marL="0">
                         <a:buNone/>
                       </a:pPr>
                       <a:endParaRPr lang="en-US" sz="2600" dirty="0">
@@ -10715,7 +10715,7 @@
                     <a:bodyPr/>
                     <a:lstStyle/>
                     <a:p>
-                      <a:pPr algn="ctr" indent="0" marL="0">
+                      <a:pPr eaLnBrk="0" algn="ctr" indent="0" marL="0">
                         <a:buNone/>
                       </a:pPr>
                       <a:r>
@@ -10783,7 +10783,7 @@
                     <a:bodyPr/>
                     <a:lstStyle/>
                     <a:p>
-                      <a:pPr algn="ctr" indent="0" marL="0">
+                      <a:pPr eaLnBrk="0" algn="ctr" indent="0" marL="0">
                         <a:buNone/>
                       </a:pPr>
                       <a:endParaRPr lang="en-US" sz="2600" dirty="0">
@@ -10840,7 +10840,7 @@
                     <a:bodyPr/>
                     <a:lstStyle/>
                     <a:p>
-                      <a:pPr algn="ctr" indent="0" marL="0">
+                      <a:pPr eaLnBrk="0" algn="ctr" indent="0" marL="0">
                         <a:buNone/>
                       </a:pPr>
                       <a:endParaRPr lang="en-US" sz="2600" dirty="0">
@@ -10936,7 +10936,7 @@
             </a:lvl1pPr>
           </a:lstStyle>
           <a:p>
-            <a:pPr algn="r"/>
+            <a:pPr eaLnBrk="0" algn="r"/>
             <a:fld id="{F7021451-1387-4CA6-816F-3879F97B5CBC}" type="slidenum">
               <a:rPr b="0" lang="en-US"/>
               <a:t>5</a:t>
@@ -10993,7 +10993,7 @@
           <a:bodyPr wrap="square" lIns="0" tIns="0" rIns="0" bIns="0" rtlCol="0" anchor="ctr"/>
           <a:lstStyle/>
           <a:p>
-            <a:pPr algn="l" indent="0" marL="0">
+            <a:pPr eaLnBrk="0" algn="l" indent="0" marL="0">
               <a:buNone/>
             </a:pPr>
             <a:r>
@@ -11059,7 +11059,7 @@
           <a:bodyPr wrap="square" lIns="0" tIns="0" rIns="0" bIns="0" rtlCol="0" anchor="ctr"/>
           <a:lstStyle/>
           <a:p>
-            <a:pPr indent="0" marL="0">
+            <a:pPr eaLnBrk="0" indent="0" marL="0">
               <a:spcAft>
                 <a:spcPts val="600"/>
               </a:spcAft>
@@ -11128,7 +11128,7 @@
           <a:bodyPr wrap="square" lIns="0" tIns="0" rIns="0" bIns="0" rtlCol="0" anchor="ctr"/>
           <a:lstStyle/>
           <a:p>
-            <a:pPr indent="0" marL="0">
+            <a:pPr eaLnBrk="0" indent="0" marL="0">
               <a:spcAft>
                 <a:spcPts val="600"/>
               </a:spcAft>
@@ -11148,7 +11148,7 @@
             <a:endParaRPr lang="ko-KR" sz="2800" dirty="0"/>
           </a:p>
           <a:p>
-            <a:pPr indent="0" marL="0">
+            <a:pPr eaLnBrk="0" indent="0" marL="0">
               <a:spcAft>
                 <a:spcPts val="600"/>
               </a:spcAft>
@@ -11168,7 +11168,7 @@
             <a:endParaRPr lang="ko-KR" sz="2800" dirty="0"/>
           </a:p>
           <a:p>
-            <a:pPr indent="0" marL="0">
+            <a:pPr eaLnBrk="0" indent="0" marL="0">
               <a:spcAft>
                 <a:spcPts val="600"/>
               </a:spcAft>
@@ -11216,7 +11216,7 @@
           <a:bodyPr wrap="square" lIns="0" tIns="0" rIns="0" bIns="0" rtlCol="0" anchor="ctr"/>
           <a:lstStyle/>
           <a:p>
-            <a:pPr algn="ctr" indent="0" marL="0">
+            <a:pPr eaLnBrk="0" algn="ctr" indent="0" marL="0">
               <a:buNone/>
             </a:pPr>
             <a:r>
@@ -11255,7 +11255,7 @@
           <a:bodyPr wrap="square" lIns="0" tIns="0" rIns="0" bIns="0" rtlCol="0" anchor="t"/>
           <a:lstStyle/>
           <a:p>
-            <a:pPr algn="l" indent="0" marL="0">
+            <a:pPr eaLnBrk="0" algn="l" indent="0" marL="0">
               <a:buNone/>
             </a:pPr>
             <a:r>
@@ -11272,7 +11272,7 @@
             <a:endParaRPr lang="ko-KR" sz="2200" dirty="0"/>
           </a:p>
           <a:p>
-            <a:pPr algn="l" indent="0" marL="0">
+            <a:pPr eaLnBrk="0" algn="l" indent="0" marL="0">
               <a:buNone/>
             </a:pPr>
             <a:r>
@@ -11317,7 +11317,7 @@
           <a:bodyPr wrap="square" lIns="0" tIns="0" rIns="0" bIns="0" rtlCol="0" anchor="ctr"/>
           <a:lstStyle/>
           <a:p>
-            <a:pPr algn="ctr" indent="0" marL="0">
+            <a:pPr eaLnBrk="0" algn="ctr" indent="0" marL="0">
               <a:buNone/>
             </a:pPr>
             <a:r>
@@ -11356,7 +11356,7 @@
           <a:bodyPr wrap="square" lIns="0" tIns="0" rIns="0" bIns="0" rtlCol="0" anchor="t"/>
           <a:lstStyle/>
           <a:p>
-            <a:pPr algn="l" indent="0" marL="0">
+            <a:pPr eaLnBrk="0" algn="l" indent="0" marL="0">
               <a:buNone/>
             </a:pPr>
             <a:r>
@@ -11373,7 +11373,7 @@
             <a:endParaRPr lang="ko-KR" sz="2200" dirty="0"/>
           </a:p>
           <a:p>
-            <a:pPr algn="l" indent="0" marL="0">
+            <a:pPr eaLnBrk="0" algn="l" indent="0" marL="0">
               <a:buNone/>
             </a:pPr>
             <a:r>
@@ -11418,7 +11418,7 @@
           <a:bodyPr wrap="square" lIns="0" tIns="0" rIns="0" bIns="0" rtlCol="0" anchor="ctr"/>
           <a:lstStyle/>
           <a:p>
-            <a:pPr algn="ctr" indent="0" marL="0">
+            <a:pPr eaLnBrk="0" algn="ctr" indent="0" marL="0">
               <a:buNone/>
             </a:pPr>
             <a:r>
@@ -11457,7 +11457,7 @@
           <a:bodyPr wrap="square" lIns="0" tIns="0" rIns="0" bIns="0" rtlCol="0" anchor="t"/>
           <a:lstStyle/>
           <a:p>
-            <a:pPr algn="l" indent="0" marL="0">
+            <a:pPr eaLnBrk="0" algn="l" indent="0" marL="0">
               <a:buNone/>
             </a:pPr>
             <a:r>
@@ -11474,7 +11474,7 @@
             <a:endParaRPr lang="ko-KR" sz="2200" dirty="0"/>
           </a:p>
           <a:p>
-            <a:pPr algn="l" indent="0" marL="0">
+            <a:pPr eaLnBrk="0" algn="l" indent="0" marL="0">
               <a:buNone/>
             </a:pPr>
             <a:r>
@@ -11519,7 +11519,7 @@
           <a:bodyPr wrap="square" lIns="0" tIns="0" rIns="0" bIns="0" rtlCol="0" anchor="ctr"/>
           <a:lstStyle/>
           <a:p>
-            <a:pPr algn="ctr" indent="0" marL="0">
+            <a:pPr eaLnBrk="0" algn="ctr" indent="0" marL="0">
               <a:buNone/>
             </a:pPr>
             <a:r>
@@ -11558,7 +11558,7 @@
           <a:bodyPr wrap="square" lIns="0" tIns="0" rIns="0" bIns="0" rtlCol="0" anchor="t"/>
           <a:lstStyle/>
           <a:p>
-            <a:pPr algn="l" indent="0" marL="0">
+            <a:pPr eaLnBrk="0" algn="l" indent="0" marL="0">
               <a:buNone/>
             </a:pPr>
             <a:r>
@@ -11575,7 +11575,7 @@
             <a:endParaRPr lang="ko-KR" sz="2200" dirty="0"/>
           </a:p>
           <a:p>
-            <a:pPr algn="l" indent="0" marL="0">
+            <a:pPr eaLnBrk="0" algn="l" indent="0" marL="0">
               <a:buNone/>
             </a:pPr>
             <a:r>
@@ -11632,7 +11632,7 @@
             </a:lvl1pPr>
           </a:lstStyle>
           <a:p>
-            <a:pPr algn="r"/>
+            <a:pPr eaLnBrk="0" algn="r"/>
             <a:fld id="{F7021451-1387-4CA6-816F-3879F97B5CBC}" type="slidenum">
               <a:rPr b="0" lang="en-US"/>
               <a:t>6</a:t>
@@ -11689,7 +11689,7 @@
           <a:bodyPr wrap="square" lIns="0" tIns="0" rIns="0" bIns="0" rtlCol="0" anchor="ctr"/>
           <a:lstStyle/>
           <a:p>
-            <a:pPr algn="l" indent="0" marL="0">
+            <a:pPr eaLnBrk="0" algn="l" indent="0" marL="0">
               <a:buNone/>
             </a:pPr>
             <a:r>
@@ -11728,7 +11728,7 @@
           <a:bodyPr wrap="square" lIns="0" tIns="0" rIns="0" bIns="0" rtlCol="0" anchor="ctr"/>
           <a:lstStyle/>
           <a:p>
-            <a:pPr algn="l" indent="0" marL="0">
+            <a:pPr eaLnBrk="0" algn="l" indent="0" marL="0">
               <a:buNone/>
             </a:pPr>
             <a:r>
@@ -11794,7 +11794,7 @@
           <a:bodyPr wrap="square" lIns="0" tIns="0" rIns="0" bIns="0" rtlCol="0" anchor="ctr"/>
           <a:lstStyle/>
           <a:p>
-            <a:pPr indent="0" marL="0">
+            <a:pPr eaLnBrk="0" indent="0" marL="0">
               <a:spcAft>
                 <a:spcPts val="600"/>
               </a:spcAft>
@@ -11848,7 +11848,7 @@
                     <a:bodyPr/>
                     <a:lstStyle/>
                     <a:p>
-                      <a:pPr algn="ctr" indent="0" marL="0">
+                      <a:pPr eaLnBrk="0" algn="ctr" indent="0" marL="0">
                         <a:buNone/>
                       </a:pPr>
                       <a:endParaRPr lang="en-US" sz="2600" dirty="0">
@@ -11905,7 +11905,7 @@
                     <a:bodyPr/>
                     <a:lstStyle/>
                     <a:p>
-                      <a:pPr algn="ctr" indent="0" marL="0">
+                      <a:pPr eaLnBrk="0" algn="ctr" indent="0" marL="0">
                         <a:buNone/>
                       </a:pPr>
                       <a:r>
@@ -11973,7 +11973,7 @@
                     <a:bodyPr/>
                     <a:lstStyle/>
                     <a:p>
-                      <a:pPr algn="ctr" indent="0" marL="0">
+                      <a:pPr eaLnBrk="0" algn="ctr" indent="0" marL="0">
                         <a:buNone/>
                       </a:pPr>
                       <a:r>
@@ -12043,7 +12043,7 @@
                     <a:bodyPr/>
                     <a:lstStyle/>
                     <a:p>
-                      <a:pPr algn="ctr" indent="0" marL="0">
+                      <a:pPr eaLnBrk="0" algn="ctr" indent="0" marL="0">
                         <a:buNone/>
                       </a:pPr>
                       <a:r>
@@ -12111,7 +12111,7 @@
                     <a:bodyPr/>
                     <a:lstStyle/>
                     <a:p>
-                      <a:pPr algn="ctr" indent="0" marL="0">
+                      <a:pPr eaLnBrk="0" algn="ctr" indent="0" marL="0">
                         <a:buNone/>
                       </a:pPr>
                       <a:endParaRPr lang="en-US" sz="2600" dirty="0">
@@ -12168,7 +12168,7 @@
                     <a:bodyPr/>
                     <a:lstStyle/>
                     <a:p>
-                      <a:pPr algn="ctr" indent="0" marL="0">
+                      <a:pPr eaLnBrk="0" algn="ctr" indent="0" marL="0">
                         <a:buNone/>
                       </a:pPr>
                       <a:endParaRPr lang="en-US" sz="2600" dirty="0">
@@ -12227,7 +12227,7 @@
                     <a:bodyPr/>
                     <a:lstStyle/>
                     <a:p>
-                      <a:pPr algn="ctr" indent="0" marL="0">
+                      <a:pPr eaLnBrk="0" algn="ctr" indent="0" marL="0">
                         <a:buNone/>
                       </a:pPr>
                       <a:r>
@@ -12295,7 +12295,7 @@
                     <a:bodyPr/>
                     <a:lstStyle/>
                     <a:p>
-                      <a:pPr algn="ctr" indent="0" marL="0">
+                      <a:pPr eaLnBrk="0" algn="ctr" indent="0" marL="0">
                         <a:buNone/>
                       </a:pPr>
                       <a:endParaRPr lang="en-US" sz="2600" dirty="0">
@@ -12352,7 +12352,7 @@
                     <a:bodyPr/>
                     <a:lstStyle/>
                     <a:p>
-                      <a:pPr algn="ctr" indent="0" marL="0">
+                      <a:pPr eaLnBrk="0" algn="ctr" indent="0" marL="0">
                         <a:buNone/>
                       </a:pPr>
                       <a:endParaRPr lang="en-US" sz="2600" dirty="0">
@@ -12411,7 +12411,7 @@
                     <a:bodyPr/>
                     <a:lstStyle/>
                     <a:p>
-                      <a:pPr algn="ctr" indent="0" marL="0">
+                      <a:pPr eaLnBrk="0" algn="ctr" indent="0" marL="0">
                         <a:buNone/>
                       </a:pPr>
                       <a:r>
@@ -12479,7 +12479,7 @@
                     <a:bodyPr/>
                     <a:lstStyle/>
                     <a:p>
-                      <a:pPr algn="ctr" indent="0" marL="0">
+                      <a:pPr eaLnBrk="0" algn="ctr" indent="0" marL="0">
                         <a:buNone/>
                       </a:pPr>
                       <a:endParaRPr lang="en-US" sz="2600" dirty="0">
@@ -12536,7 +12536,7 @@
                     <a:bodyPr/>
                     <a:lstStyle/>
                     <a:p>
-                      <a:pPr algn="ctr" indent="0" marL="0">
+                      <a:pPr eaLnBrk="0" algn="ctr" indent="0" marL="0">
                         <a:buNone/>
                       </a:pPr>
                       <a:endParaRPr lang="en-US" sz="2600" dirty="0">
@@ -12632,7 +12632,7 @@
             </a:lvl1pPr>
           </a:lstStyle>
           <a:p>
-            <a:pPr algn="r"/>
+            <a:pPr eaLnBrk="0" algn="r"/>
             <a:fld id="{F7021451-1387-4CA6-816F-3879F97B5CBC}" type="slidenum">
               <a:rPr b="0" lang="en-US"/>
               <a:t>7</a:t>
@@ -12689,7 +12689,7 @@
           <a:bodyPr wrap="square" lIns="0" tIns="0" rIns="0" bIns="0" rtlCol="0" anchor="ctr"/>
           <a:lstStyle/>
           <a:p>
-            <a:pPr algn="l" indent="0" marL="0">
+            <a:pPr eaLnBrk="0" algn="l" indent="0" marL="0">
               <a:buNone/>
             </a:pPr>
             <a:r>
@@ -12755,7 +12755,7 @@
           <a:bodyPr wrap="square" lIns="0" tIns="0" rIns="0" bIns="0" rtlCol="0" anchor="ctr"/>
           <a:lstStyle/>
           <a:p>
-            <a:pPr indent="0" marL="0">
+            <a:pPr eaLnBrk="0" indent="0" marL="0">
               <a:spcAft>
                 <a:spcPts val="600"/>
               </a:spcAft>
@@ -12824,7 +12824,7 @@
           <a:bodyPr wrap="square" lIns="0" tIns="0" rIns="0" bIns="0" rtlCol="0" anchor="ctr"/>
           <a:lstStyle/>
           <a:p>
-            <a:pPr indent="0" marL="0">
+            <a:pPr eaLnBrk="0" indent="0" marL="0">
               <a:spcAft>
                 <a:spcPts val="600"/>
               </a:spcAft>
@@ -12874,7 +12874,7 @@
           <a:bodyPr wrap="square" lIns="177800" tIns="0" rIns="177800" bIns="0" rtlCol="0" anchor="ctr"/>
           <a:lstStyle/>
           <a:p>
-            <a:pPr algn="l" indent="0" marL="0">
+            <a:pPr eaLnBrk="0" algn="l" indent="0" marL="0">
               <a:buNone/>
             </a:pPr>
             <a:r>
@@ -12913,7 +12913,7 @@
           <a:bodyPr wrap="square" lIns="0" tIns="0" rIns="0" bIns="0" rtlCol="0" anchor="t"/>
           <a:lstStyle/>
           <a:p>
-            <a:pPr algn="l" indent="0" marL="0">
+            <a:pPr eaLnBrk="0" algn="l" indent="0" marL="0">
               <a:buNone/>
             </a:pPr>
             <a:r>
@@ -12930,7 +12930,7 @@
             <a:endParaRPr lang="ko-KR" sz="2800" dirty="0"/>
           </a:p>
           <a:p>
-            <a:pPr algn="l" indent="0" marL="0">
+            <a:pPr eaLnBrk="0" algn="l" indent="0" marL="0">
               <a:buNone/>
             </a:pPr>
             <a:r>
@@ -12977,7 +12977,7 @@
           <a:bodyPr wrap="square" lIns="177800" tIns="0" rIns="177800" bIns="0" rtlCol="0" anchor="ctr"/>
           <a:lstStyle/>
           <a:p>
-            <a:pPr algn="l" indent="0" marL="0">
+            <a:pPr eaLnBrk="0" algn="l" indent="0" marL="0">
               <a:buNone/>
             </a:pPr>
             <a:r>
@@ -13016,7 +13016,7 @@
           <a:bodyPr wrap="square" lIns="0" tIns="0" rIns="0" bIns="0" rtlCol="0" anchor="t"/>
           <a:lstStyle/>
           <a:p>
-            <a:pPr algn="l" indent="0" marL="0">
+            <a:pPr eaLnBrk="0" algn="l" indent="0" marL="0">
               <a:buNone/>
             </a:pPr>
             <a:r>
@@ -13033,7 +13033,7 @@
             <a:endParaRPr lang="ko-KR" sz="2800" dirty="0"/>
           </a:p>
           <a:p>
-            <a:pPr algn="l" indent="0" marL="0">
+            <a:pPr eaLnBrk="0" algn="l" indent="0" marL="0">
               <a:buNone/>
             </a:pPr>
             <a:r>
@@ -13090,7 +13090,7 @@
             </a:lvl1pPr>
           </a:lstStyle>
           <a:p>
-            <a:pPr algn="r"/>
+            <a:pPr eaLnBrk="0" algn="r"/>
             <a:fld id="{F7021451-1387-4CA6-816F-3879F97B5CBC}" type="slidenum">
               <a:rPr b="0" lang="en-US"/>
               <a:t>8</a:t>
@@ -13147,7 +13147,7 @@
           <a:bodyPr wrap="square" lIns="0" tIns="0" rIns="0" bIns="0" rtlCol="0" anchor="ctr"/>
           <a:lstStyle/>
           <a:p>
-            <a:pPr algn="l" indent="0" marL="0">
+            <a:pPr eaLnBrk="0" algn="l" indent="0" marL="0">
               <a:buNone/>
             </a:pPr>
             <a:r>
@@ -13186,7 +13186,7 @@
           <a:bodyPr wrap="square" lIns="0" tIns="0" rIns="0" bIns="0" rtlCol="0" anchor="ctr"/>
           <a:lstStyle/>
           <a:p>
-            <a:pPr algn="l" indent="0" marL="0">
+            <a:pPr eaLnBrk="0" algn="l" indent="0" marL="0">
               <a:buNone/>
             </a:pPr>
             <a:r>
@@ -13252,7 +13252,7 @@
           <a:bodyPr wrap="square" lIns="0" tIns="0" rIns="0" bIns="0" rtlCol="0" anchor="ctr"/>
           <a:lstStyle/>
           <a:p>
-            <a:pPr indent="0" marL="0">
+            <a:pPr eaLnBrk="0" indent="0" marL="0">
               <a:spcAft>
                 <a:spcPts val="600"/>
               </a:spcAft>
@@ -13321,7 +13321,7 @@
           <a:bodyPr wrap="square" lIns="0" tIns="0" rIns="0" bIns="0" rtlCol="0" anchor="ctr"/>
           <a:lstStyle/>
           <a:p>
-            <a:pPr indent="0" marL="0">
+            <a:pPr eaLnBrk="0" indent="0" marL="0">
               <a:spcAft>
                 <a:spcPts val="600"/>
               </a:spcAft>
@@ -13341,7 +13341,7 @@
             <a:endParaRPr lang="ko-KR" sz="2800" dirty="0"/>
           </a:p>
           <a:p>
-            <a:pPr indent="0" marL="0">
+            <a:pPr eaLnBrk="0" indent="0" marL="0">
               <a:spcAft>
                 <a:spcPts val="600"/>
               </a:spcAft>
@@ -13361,7 +13361,7 @@
             <a:endParaRPr lang="ko-KR" sz="2800" dirty="0"/>
           </a:p>
           <a:p>
-            <a:pPr indent="0" marL="0">
+            <a:pPr eaLnBrk="0" indent="0" marL="0">
               <a:spcAft>
                 <a:spcPts val="600"/>
               </a:spcAft>
@@ -13381,7 +13381,7 @@
             <a:endParaRPr lang="ko-KR" sz="2800" dirty="0"/>
           </a:p>
           <a:p>
-            <a:pPr indent="0" marL="0">
+            <a:pPr eaLnBrk="0" indent="0" marL="0">
               <a:spcAft>
                 <a:spcPts val="600"/>
               </a:spcAft>
@@ -13450,7 +13450,7 @@
           <a:bodyPr wrap="square" lIns="0" tIns="0" rIns="0" bIns="0" rtlCol="0" anchor="ctr"/>
           <a:lstStyle/>
           <a:p>
-            <a:pPr indent="0" marL="0">
+            <a:pPr eaLnBrk="0" indent="0" marL="0">
               <a:spcAft>
                 <a:spcPts val="600"/>
               </a:spcAft>
@@ -13470,7 +13470,7 @@
             <a:endParaRPr lang="ko-KR" sz="2800" dirty="0"/>
           </a:p>
           <a:p>
-            <a:pPr indent="0" marL="0">
+            <a:pPr eaLnBrk="0" indent="0" marL="0">
               <a:spcAft>
                 <a:spcPts val="600"/>
               </a:spcAft>
@@ -13490,7 +13490,7 @@
             <a:endParaRPr lang="ko-KR" sz="2800" dirty="0"/>
           </a:p>
           <a:p>
-            <a:pPr indent="0" marL="0">
+            <a:pPr eaLnBrk="0" indent="0" marL="0">
               <a:spcAft>
                 <a:spcPts val="600"/>
               </a:spcAft>
@@ -13510,7 +13510,7 @@
             <a:endParaRPr lang="ko-KR" sz="2800" dirty="0"/>
           </a:p>
           <a:p>
-            <a:pPr indent="0" marL="0">
+            <a:pPr eaLnBrk="0" indent="0" marL="0">
               <a:spcAft>
                 <a:spcPts val="600"/>
               </a:spcAft>
@@ -13579,7 +13579,7 @@
           <a:bodyPr wrap="square" lIns="0" tIns="0" rIns="0" bIns="0" rtlCol="0" anchor="ctr"/>
           <a:lstStyle/>
           <a:p>
-            <a:pPr indent="0" marL="0">
+            <a:pPr eaLnBrk="0" indent="0" marL="0">
               <a:spcAft>
                 <a:spcPts val="600"/>
               </a:spcAft>
@@ -13599,7 +13599,7 @@
             <a:endParaRPr lang="ko-KR" sz="2800" dirty="0"/>
           </a:p>
           <a:p>
-            <a:pPr indent="0" marL="0">
+            <a:pPr eaLnBrk="0" indent="0" marL="0">
               <a:spcAft>
                 <a:spcPts val="600"/>
               </a:spcAft>
@@ -13619,7 +13619,7 @@
             <a:endParaRPr lang="ko-KR" sz="2800" dirty="0"/>
           </a:p>
           <a:p>
-            <a:pPr indent="0" marL="0">
+            <a:pPr eaLnBrk="0" indent="0" marL="0">
               <a:spcAft>
                 <a:spcPts val="600"/>
               </a:spcAft>
@@ -13639,7 +13639,7 @@
             <a:endParaRPr lang="ko-KR" sz="2800" dirty="0"/>
           </a:p>
           <a:p>
-            <a:pPr indent="0" marL="0">
+            <a:pPr eaLnBrk="0" indent="0" marL="0">
               <a:spcAft>
                 <a:spcPts val="600"/>
               </a:spcAft>
@@ -13699,7 +13699,7 @@
             </a:lvl1pPr>
           </a:lstStyle>
           <a:p>
-            <a:pPr algn="r"/>
+            <a:pPr eaLnBrk="0" algn="r"/>
             <a:fld id="{F7021451-1387-4CA6-816F-3879F97B5CBC}" type="slidenum">
               <a:rPr b="0" lang="en-US"/>
               <a:t>9</a:t>
@@ -13717,47 +13717,47 @@
 </file>
 
 <file path=ppt/theme/theme1.xml><?xml version="1.0" encoding="utf-8"?>
-<a:theme xmlns:a="http://schemas.openxmlformats.org/drawingml/2006/main" name="Office Theme">
+<a:theme xmlns:a="http://schemas.openxmlformats.org/drawingml/2006/main" name="Education Classroom">
   <a:themeElements>
-    <a:clrScheme name="Office">
+    <a:clrScheme name="Education Classroom">
       <a:dk1>
-        <a:sysClr val="windowText" lastClr="000000"/>
+        <a:srgbClr val="1F2937"/>
       </a:dk1>
       <a:lt1>
-        <a:sysClr val="window" lastClr="FFFFFF"/>
+        <a:srgbClr val="FFFFFF"/>
       </a:lt1>
       <a:dk2>
-        <a:srgbClr val="44546A"/>
+        <a:srgbClr val="264653"/>
       </a:dk2>
       <a:lt2>
-        <a:srgbClr val="E7E6E6"/>
+        <a:srgbClr val="EAF3F1"/>
       </a:lt2>
       <a:accent1>
-        <a:srgbClr val="4472C4"/>
+        <a:srgbClr val="E9762B"/>
       </a:accent1>
       <a:accent2>
-        <a:srgbClr val="ED7D31"/>
+        <a:srgbClr val="2A9D8F"/>
       </a:accent2>
       <a:accent3>
-        <a:srgbClr val="A5A5A5"/>
+        <a:srgbClr val="C8434E"/>
       </a:accent3>
       <a:accent4>
-        <a:srgbClr val="FFC000"/>
+        <a:srgbClr val="3D5A80"/>
       </a:accent4>
       <a:accent5>
-        <a:srgbClr val="5B9BD5"/>
+        <a:srgbClr val="F2C14E"/>
       </a:accent5>
       <a:accent6>
-        <a:srgbClr val="70AD47"/>
+        <a:srgbClr val="4B5563"/>
       </a:accent6>
       <a:hlink>
-        <a:srgbClr val="0563C1"/>
+        <a:srgbClr val="3D5A80"/>
       </a:hlink>
       <a:folHlink>
-        <a:srgbClr val="954F72"/>
+        <a:srgbClr val="7A4E8A"/>
       </a:folHlink>
     </a:clrScheme>
-    <a:fontScheme name="Office">
+    <a:fontScheme name="Education Classroom">
       <a:majorFont>
         <a:latin typeface="맑은 고딕"/>
         <a:ea typeface=""/>
